--- a/CoolRover_presentation.pptx
+++ b/CoolRover_presentation.pptx
@@ -29348,7 +29348,31 @@
                 <a:cs typeface="Calibri"/>
                 <a:sym typeface="Calibri"/>
               </a:rPr>
-              <a:t>Chase a phone by Wi-Fi</a:t>
+              <a:t>Chase a phone by Bluetoo</a:t>
+            </a:r>
+            <a:r>
+              <a:rPr b="1" lang="en-US" sz="1300">
+                <a:solidFill>
+                  <a:schemeClr val="dk1"/>
+                </a:solidFill>
+                <a:latin typeface="Calibri"/>
+                <a:ea typeface="Calibri"/>
+                <a:cs typeface="Calibri"/>
+                <a:sym typeface="Calibri"/>
+              </a:rPr>
+              <a:t>th / </a:t>
+            </a:r>
+            <a:r>
+              <a:rPr b="1" i="0" lang="en-US" spc="0" sz="1300" u="none" cap="none" strike="noStrike">
+                <a:solidFill>
+                  <a:schemeClr val="dk1"/>
+                </a:solidFill>
+                <a:latin typeface="Calibri"/>
+                <a:ea typeface="Calibri"/>
+                <a:cs typeface="Calibri"/>
+                <a:sym typeface="Calibri"/>
+              </a:rPr>
+              <a:t>Wi-Fi</a:t>
             </a:r>
             <a:endParaRPr b="0" i="0" spc="0" sz="1300" u="none" cap="none" strike="noStrike">
               <a:solidFill>
@@ -29414,7 +29438,7 @@
                 <a:cs typeface="Calibri"/>
                 <a:sym typeface="Calibri"/>
               </a:rPr>
-              <a:t>RSSI hunt, room simulator and a Webots Q-learning experiment.</a:t>
+              <a:t>RSSI hunt</a:t>
             </a:r>
             <a:endParaRPr b="0" i="0" spc="0" sz="1100" u="none" cap="none" strike="noStrike">
               <a:solidFill>
@@ -30380,7 +30404,7 @@
                 <a:cs typeface="Calibri"/>
                 <a:sym typeface="Calibri"/>
               </a:rPr>
-              <a:t>3D-printed shell, self-calibration, pulse turns, straight-line legs.</a:t>
+              <a:t>3D-printed shell installation, self-calibration, pulse turns, straight-line legs.</a:t>
             </a:r>
             <a:endParaRPr b="0" i="0" spc="0" sz="1100" u="none" cap="none" strike="noStrike">
               <a:solidFill>

--- a/CoolRover_presentation.pptx
+++ b/CoolRover_presentation.pptx
@@ -15,6 +15,7 @@
     <p:sldId id="260" r:id="rId9"/>
     <p:sldId id="261" r:id="rId10"/>
     <p:sldId id="262" r:id="rId11"/>
+    <p:sldId id="263" r:id="rId12"/>
   </p:sldIdLst>
   <p:sldSz cy="5143500" cx="9144000"/>
   <p:notesSz cx="5143500" cy="9144000"/>
@@ -2984,6 +2985,150 @@
 </p:notes>
 </file>
 
+<file path=ppt/notesSlides/notesSlide8.xml><?xml version="1.0" encoding="utf-8"?>
+<p:notes xmlns:a="http://schemas.openxmlformats.org/drawingml/2006/main" xmlns:r="http://schemas.openxmlformats.org/officeDocument/2006/relationships" xmlns:mc="http://schemas.openxmlformats.org/markup-compatibility/2006" xmlns:mv="urn:schemas-microsoft-com:mac:vml" xmlns:p="http://schemas.openxmlformats.org/presentationml/2006/main" xmlns:c="http://schemas.openxmlformats.org/drawingml/2006/chart" xmlns:dgm="http://schemas.openxmlformats.org/drawingml/2006/diagram" xmlns:o="urn:schemas-microsoft-com:office:office" xmlns:v="urn:schemas-microsoft-com:vml" xmlns:pvml="urn:schemas-microsoft-com:office:powerpoint" xmlns:com="http://schemas.openxmlformats.org/drawingml/2006/compatibility" xmlns:p14="http://schemas.microsoft.com/office/powerpoint/2010/main" xmlns:p15="http://schemas.microsoft.com/office/powerpoint/2012/main" xmlns:ahyp="http://schemas.microsoft.com/office/drawing/2018/hyperlinkcolor" showMasterPhAnim="0" showMasterSp="0">
+  <p:cSld>
+    <p:spTree>
+      <p:nvGrpSpPr>
+        <p:cNvPr id="462" name="Shape 462"/>
+        <p:cNvGrpSpPr/>
+        <p:nvPr/>
+      </p:nvGrpSpPr>
+      <p:grpSpPr>
+        <a:xfrm>
+          <a:off x="0" y="0"/>
+          <a:ext cx="0" cy="0"/>
+          <a:chOff x="0" y="0"/>
+          <a:chExt cx="0" cy="0"/>
+        </a:xfrm>
+      </p:grpSpPr>
+      <p:sp>
+        <p:nvSpPr>
+          <p:cNvPr id="463" name="Google Shape;463;h32057b63754114a5_20_0:notes"/>
+          <p:cNvSpPr/>
+          <p:nvPr>
+            <p:ph idx="2" type="sldImg"/>
+          </p:nvPr>
+        </p:nvSpPr>
+        <p:spPr>
+          <a:xfrm>
+            <a:off x="685800" y="1143000"/>
+            <a:ext cx="5486400" cy="3086100"/>
+          </a:xfrm>
+          <a:custGeom>
+            <a:rect b="b" l="l" r="r" t="t"/>
+            <a:pathLst>
+              <a:path extrusionOk="0" h="120000" w="120000">
+                <a:moveTo>
+                  <a:pt x="0" y="0"/>
+                </a:moveTo>
+                <a:lnTo>
+                  <a:pt x="120000" y="0"/>
+                </a:lnTo>
+                <a:lnTo>
+                  <a:pt x="120000" y="120000"/>
+                </a:lnTo>
+                <a:lnTo>
+                  <a:pt x="0" y="120000"/>
+                </a:lnTo>
+                <a:close/>
+              </a:path>
+            </a:pathLst>
+          </a:custGeom>
+        </p:spPr>
+      </p:sp>
+      <p:sp>
+        <p:nvSpPr>
+          <p:cNvPr id="464" name="Google Shape;464;h32057b63754114a5_20_0:notes"/>
+          <p:cNvSpPr txBox="1"/>
+          <p:nvPr>
+            <p:ph idx="1" type="body"/>
+          </p:nvPr>
+        </p:nvSpPr>
+        <p:spPr>
+          <a:xfrm>
+            <a:off x="685800" y="4400550"/>
+            <a:ext cx="5486400" cy="3600600"/>
+          </a:xfrm>
+          <a:prstGeom prst="rect">
+            <a:avLst/>
+          </a:prstGeom>
+        </p:spPr>
+        <p:txBody>
+          <a:bodyPr anchorCtr="0" anchor="t" bIns="45700" lIns="91425" spcFirstLastPara="1" rIns="91425" wrap="square" tIns="45700">
+            <a:noAutofit/>
+          </a:bodyPr>
+          <a:lstStyle/>
+          <a:p>
+            <a:pPr indent="0" lvl="0" marL="0" rtl="0" algn="l">
+              <a:spcBef>
+                <a:spcPts val="0"/>
+              </a:spcBef>
+              <a:spcAft>
+                <a:spcPts val="0"/>
+              </a:spcAft>
+              <a:buNone/>
+            </a:pPr>
+            <a:r>
+              <a:t/>
+            </a:r>
+            <a:endParaRPr/>
+          </a:p>
+        </p:txBody>
+      </p:sp>
+      <p:sp>
+        <p:nvSpPr>
+          <p:cNvPr id="465" name="Google Shape;465;h32057b63754114a5_20_0:notes"/>
+          <p:cNvSpPr txBox="1"/>
+          <p:nvPr>
+            <p:ph idx="12" type="sldNum"/>
+          </p:nvPr>
+        </p:nvSpPr>
+        <p:spPr>
+          <a:xfrm>
+            <a:off x="3884613" y="8685213"/>
+            <a:ext cx="2971800" cy="458700"/>
+          </a:xfrm>
+          <a:prstGeom prst="rect">
+            <a:avLst/>
+          </a:prstGeom>
+        </p:spPr>
+        <p:txBody>
+          <a:bodyPr anchorCtr="0" anchor="b" bIns="45700" lIns="91425" spcFirstLastPara="1" rIns="91425" wrap="square" tIns="45700">
+            <a:noAutofit/>
+          </a:bodyPr>
+          <a:lstStyle/>
+          <a:p>
+            <a:pPr indent="0" lvl="0" marL="0" rtl="0" algn="r">
+              <a:spcBef>
+                <a:spcPts val="0"/>
+              </a:spcBef>
+              <a:spcAft>
+                <a:spcPts val="0"/>
+              </a:spcAft>
+              <a:buClr>
+                <a:srgbClr val="000000"/>
+              </a:buClr>
+              <a:buSzPts val="1200"/>
+              <a:buFont typeface="Arial"/>
+              <a:buNone/>
+            </a:pPr>
+            <a:fld id="{00000000-1234-1234-1234-123412341234}" type="slidenum">
+              <a:rPr lang="en-US"/>
+              <a:t>‹#›</a:t>
+            </a:fld>
+            <a:endParaRPr/>
+          </a:p>
+        </p:txBody>
+      </p:sp>
+    </p:spTree>
+  </p:cSld>
+  <p:clrMapOvr>
+    <a:masterClrMapping/>
+  </p:clrMapOvr>
+</p:notes>
+</file>
+
 <file path=ppt/slideLayouts/slideLayout1.xml><?xml version="1.0" encoding="utf-8"?>
 <p:sldLayout xmlns:a="http://schemas.openxmlformats.org/drawingml/2006/main" xmlns:r="http://schemas.openxmlformats.org/officeDocument/2006/relationships" xmlns:mc="http://schemas.openxmlformats.org/markup-compatibility/2006" xmlns:mv="urn:schemas-microsoft-com:mac:vml" xmlns:p="http://schemas.openxmlformats.org/presentationml/2006/main" xmlns:c="http://schemas.openxmlformats.org/drawingml/2006/chart" xmlns:dgm="http://schemas.openxmlformats.org/drawingml/2006/diagram" xmlns:o="urn:schemas-microsoft-com:office:office" xmlns:v="urn:schemas-microsoft-com:vml" xmlns:pvml="urn:schemas-microsoft-com:office:powerpoint" xmlns:com="http://schemas.openxmlformats.org/drawingml/2006/compatibility" xmlns:p14="http://schemas.microsoft.com/office/powerpoint/2010/main" xmlns:p15="http://schemas.microsoft.com/office/powerpoint/2012/main" xmlns:ahyp="http://schemas.microsoft.com/office/drawing/2018/hyperlinkcolor" matchingName="TITLE_DARK">
   <p:cSld name="TITLE_DARK">
@@ -30414,6 +30559,109 @@
               <a:ea typeface="Calibri"/>
               <a:cs typeface="Calibri"/>
               <a:sym typeface="Calibri"/>
+            </a:endParaRPr>
+          </a:p>
+        </p:txBody>
+      </p:sp>
+    </p:spTree>
+  </p:cSld>
+  <p:clrMapOvr>
+    <a:masterClrMapping/>
+  </p:clrMapOvr>
+</p:sld>
+</file>
+
+<file path=ppt/slides/slide8.xml><?xml version="1.0" encoding="utf-8"?>
+<p:sld xmlns:a="http://schemas.openxmlformats.org/drawingml/2006/main" xmlns:r="http://schemas.openxmlformats.org/officeDocument/2006/relationships" xmlns:mc="http://schemas.openxmlformats.org/markup-compatibility/2006" xmlns:mv="urn:schemas-microsoft-com:mac:vml" xmlns:p="http://schemas.openxmlformats.org/presentationml/2006/main" xmlns:c="http://schemas.openxmlformats.org/drawingml/2006/chart" xmlns:dgm="http://schemas.openxmlformats.org/drawingml/2006/diagram" xmlns:o="urn:schemas-microsoft-com:office:office" xmlns:v="urn:schemas-microsoft-com:vml" xmlns:pvml="urn:schemas-microsoft-com:office:powerpoint" xmlns:com="http://schemas.openxmlformats.org/drawingml/2006/compatibility" xmlns:p14="http://schemas.microsoft.com/office/powerpoint/2010/main" xmlns:p15="http://schemas.microsoft.com/office/powerpoint/2012/main" xmlns:ahyp="http://schemas.microsoft.com/office/drawing/2018/hyperlinkcolor">
+  <p:cSld>
+    <p:spTree>
+      <p:nvGrpSpPr>
+        <p:cNvPr id="466" name="Shape 466"/>
+        <p:cNvGrpSpPr/>
+        <p:nvPr/>
+      </p:nvGrpSpPr>
+      <p:grpSpPr>
+        <a:xfrm>
+          <a:off x="0" y="0"/>
+          <a:ext cx="0" cy="0"/>
+          <a:chOff x="0" y="0"/>
+          <a:chExt cx="0" cy="0"/>
+        </a:xfrm>
+      </p:grpSpPr>
+      <p:pic>
+        <p:nvPicPr>
+          <p:cNvPr id="467" name="Google Shape;467;p14"/>
+          <p:cNvPicPr preferRelativeResize="0"/>
+          <p:nvPr/>
+        </p:nvPicPr>
+        <p:blipFill>
+          <a:blip r:embed="rId3">
+            <a:alphaModFix/>
+          </a:blip>
+          <a:stretch>
+            <a:fillRect/>
+          </a:stretch>
+        </p:blipFill>
+        <p:spPr>
+          <a:xfrm>
+            <a:off x="2668863" y="847450"/>
+            <a:ext cx="3806276" cy="3806276"/>
+          </a:xfrm>
+          <a:prstGeom prst="rect">
+            <a:avLst/>
+          </a:prstGeom>
+          <a:noFill/>
+          <a:ln>
+            <a:noFill/>
+          </a:ln>
+        </p:spPr>
+      </p:pic>
+      <p:sp>
+        <p:nvSpPr>
+          <p:cNvPr id="468" name="Google Shape;468;p14"/>
+          <p:cNvSpPr txBox="1"/>
+          <p:nvPr/>
+        </p:nvSpPr>
+        <p:spPr>
+          <a:xfrm>
+            <a:off x="1497025" y="117600"/>
+            <a:ext cx="6279000" cy="646500"/>
+          </a:xfrm>
+          <a:prstGeom prst="rect">
+            <a:avLst/>
+          </a:prstGeom>
+          <a:noFill/>
+          <a:ln>
+            <a:noFill/>
+          </a:ln>
+        </p:spPr>
+        <p:txBody>
+          <a:bodyPr anchorCtr="0" anchor="t" bIns="91425" lIns="91425" spcFirstLastPara="1" rIns="91425" wrap="square" tIns="91425">
+            <a:spAutoFit/>
+          </a:bodyPr>
+          <a:lstStyle/>
+          <a:p>
+            <a:pPr indent="0" lvl="0" marL="0" rtl="0" algn="ctr">
+              <a:spcBef>
+                <a:spcPts val="0"/>
+              </a:spcBef>
+              <a:spcAft>
+                <a:spcPts val="0"/>
+              </a:spcAft>
+              <a:buNone/>
+            </a:pPr>
+            <a:r>
+              <a:rPr b="1" lang="en-US" sz="3000">
+                <a:solidFill>
+                  <a:schemeClr val="lt1"/>
+                </a:solidFill>
+              </a:rPr>
+              <a:t>Demonstration Live Map</a:t>
+            </a:r>
+            <a:endParaRPr b="1" sz="3000">
+              <a:solidFill>
+                <a:schemeClr val="lt1"/>
+              </a:solidFill>
             </a:endParaRPr>
           </a:p>
         </p:txBody>
